--- a/weekly_presentations/week08_options_mm_hedging.pptx
+++ b/weekly_presentations/week08_options_mm_hedging.pptx
@@ -10,6 +10,10 @@
     <p:sldId id="258" r:id="rId9"/>
     <p:sldId id="259" r:id="rId10"/>
     <p:sldId id="260" r:id="rId11"/>
+    <p:sldId id="261" r:id="rId12"/>
+    <p:sldId id="262" r:id="rId13"/>
+    <p:sldId id="263" r:id="rId14"/>
+    <p:sldId id="264" r:id="rId15"/>
   </p:sldIdLst>
   <p:sldSz cx="12191695" cy="6858000" type="screen4x3"/>
   <p:notesSz cx="6858000" cy="9144000"/>
@@ -3182,24 +3186,24 @@
           <a:lstStyle/>
           <a:p>
             <a:r>
-              <a:rPr sz="3200" b="1" i="0">
+              <a:rPr sz="3000" b="1" i="0">
                 <a:solidFill>
                   <a:srgbClr val="990000"/>
                 </a:solidFill>
                 <a:latin typeface="Arial"/>
               </a:rPr>
-              <a:t>Week 8 — Options Market Making Theory and Dynamic Hedging</a:t>
-            </a:r>
-          </a:p>
-          <a:p>
-            <a:r>
-              <a:rPr sz="1900" b="0" i="1">
+              <a:t>Week 8 — Options Market Making &amp; Dynamic Hedging</a:t>
+            </a:r>
+          </a:p>
+          <a:p>
+            <a:r>
+              <a:rPr sz="1800" b="0" i="1">
                 <a:solidFill>
                   <a:srgbClr val="6D6D6D"/>
                 </a:solidFill>
                 <a:latin typeface="Arial"/>
               </a:rPr>
-              <a:t>Avellaneda-Stoikov with a vector-valued inventory</a:t>
+              <a:t>Avellaneda-Stoikov with a vector-valued (Greek) inventory</a:t>
             </a:r>
           </a:p>
         </p:txBody>
@@ -3235,49 +3239,6 @@
               </a:rPr>
               <a:t>Optimal Market Making for Cryptocurrency Options  ·  NC State University</a:t>
             </a:r>
-          </a:p>
-        </p:txBody>
-      </p:sp>
-      <p:sp>
-        <p:nvSpPr>
-          <p:cNvPr id="6" name="Rectangle 5"/>
-          <p:cNvSpPr/>
-          <p:nvPr/>
-        </p:nvSpPr>
-        <p:spPr>
-          <a:xfrm>
-            <a:off x="548640" y="5394960"/>
-            <a:ext cx="3657600" cy="38100"/>
-          </a:xfrm>
-          <a:prstGeom prst="rect">
-            <a:avLst/>
-          </a:prstGeom>
-          <a:solidFill>
-            <a:srgbClr val="CC0000"/>
-          </a:solidFill>
-          <a:ln>
-            <a:noFill/>
-          </a:ln>
-        </p:spPr>
-        <p:style>
-          <a:lnRef idx="1">
-            <a:schemeClr val="accent1"/>
-          </a:lnRef>
-          <a:fillRef idx="3">
-            <a:schemeClr val="accent1"/>
-          </a:fillRef>
-          <a:effectRef idx="2">
-            <a:schemeClr val="accent1"/>
-          </a:effectRef>
-          <a:fontRef idx="minor">
-            <a:schemeClr val="lt1"/>
-          </a:fontRef>
-        </p:style>
-        <p:txBody>
-          <a:bodyPr rtlCol="0" anchor="ctr"/>
-          <a:lstStyle/>
-          <a:p>
-            <a:pPr algn="ctr"/>
           </a:p>
         </p:txBody>
       </p:sp>
@@ -3340,13 +3301,13 @@
           <a:noFill/>
         </p:spPr>
         <p:txBody>
-          <a:bodyPr wrap="none">
+          <a:bodyPr wrap="square">
             <a:spAutoFit/>
           </a:bodyPr>
           <a:lstStyle/>
           <a:p>
             <a:r>
-              <a:rPr sz="2600" b="1" i="0">
+              <a:rPr sz="2400" b="1" i="0">
                 <a:solidFill>
                   <a:srgbClr val="990000"/>
                 </a:solidFill>
@@ -3365,8 +3326,8 @@
         </p:nvSpPr>
         <p:spPr>
           <a:xfrm>
-            <a:off x="457200" y="1234440"/>
-            <a:ext cx="11247120" cy="31750"/>
+            <a:off x="457200" y="1371600"/>
+            <a:ext cx="11247120" cy="27940"/>
           </a:xfrm>
           <a:prstGeom prst="rect">
             <a:avLst/>
@@ -3408,7 +3369,7 @@
         </p:nvSpPr>
         <p:spPr>
           <a:xfrm>
-            <a:off x="640080" y="1554480"/>
+            <a:off x="640080" y="1600200"/>
             <a:ext cx="10972800" cy="4937760"/>
           </a:xfrm>
           <a:prstGeom prst="rect">
@@ -3424,11 +3385,11 @@
           <a:p>
             <a:pPr>
               <a:spcAft>
-                <a:spcPts val="1000"/>
+                <a:spcPts val="800"/>
               </a:spcAft>
             </a:pPr>
             <a:r>
-              <a:rPr sz="1900" b="0" i="0">
+              <a:rPr sz="1700" b="0" i="0">
                 <a:solidFill>
                   <a:srgbClr val="1A1A1A"/>
                 </a:solidFill>
@@ -3440,33 +3401,33 @@
           <a:p>
             <a:pPr>
               <a:spcAft>
-                <a:spcPts val="1000"/>
+                <a:spcPts val="800"/>
               </a:spcAft>
             </a:pPr>
             <a:r>
-              <a:rPr sz="1900" b="0" i="0">
+              <a:rPr sz="1700" b="0" i="0">
                 <a:solidFill>
                   <a:srgbClr val="1A1A1A"/>
                 </a:solidFill>
                 <a:latin typeface="Arial"/>
               </a:rPr>
-              <a:t>•  Understand the inventory penalty as a quadratic form</a:t>
+              <a:t>•  Understand the quadratic inventory penalty</a:t>
             </a:r>
           </a:p>
           <a:p>
             <a:pPr>
               <a:spcAft>
-                <a:spcPts val="1000"/>
+                <a:spcPts val="800"/>
               </a:spcAft>
             </a:pPr>
             <a:r>
-              <a:rPr sz="1900" b="0" i="0">
+              <a:rPr sz="1700" b="0" i="0">
                 <a:solidFill>
                   <a:srgbClr val="1A1A1A"/>
                 </a:solidFill>
                 <a:latin typeface="Arial"/>
               </a:rPr>
-              <a:t>•  Quantify the P&amp;L attribution of a hedged options book</a:t>
+              <a:t>•  Quantify the P&amp;L of a delta-hedged book</a:t>
             </a:r>
           </a:p>
         </p:txBody>
@@ -3530,13 +3491,13 @@
           <a:noFill/>
         </p:spPr>
         <p:txBody>
-          <a:bodyPr wrap="none">
+          <a:bodyPr wrap="square">
             <a:spAutoFit/>
           </a:bodyPr>
           <a:lstStyle/>
           <a:p>
             <a:r>
-              <a:rPr sz="2600" b="1" i="0">
+              <a:rPr sz="2400" b="1" i="0">
                 <a:solidFill>
                   <a:srgbClr val="990000"/>
                 </a:solidFill>
@@ -3555,8 +3516,8 @@
         </p:nvSpPr>
         <p:spPr>
           <a:xfrm>
-            <a:off x="457200" y="1234440"/>
-            <a:ext cx="11247120" cy="31750"/>
+            <a:off x="457200" y="1371600"/>
+            <a:ext cx="11247120" cy="27940"/>
           </a:xfrm>
           <a:prstGeom prst="rect">
             <a:avLst/>
@@ -3598,7 +3559,7 @@
         </p:nvSpPr>
         <p:spPr>
           <a:xfrm>
-            <a:off x="640080" y="1554480"/>
+            <a:off x="640080" y="1600200"/>
             <a:ext cx="10972800" cy="4937760"/>
           </a:xfrm>
           <a:prstGeom prst="rect">
@@ -3614,65 +3575,49 @@
           <a:p>
             <a:pPr>
               <a:spcAft>
-                <a:spcPts val="1000"/>
+                <a:spcPts val="800"/>
               </a:spcAft>
             </a:pPr>
             <a:r>
-              <a:rPr sz="1900" b="0" i="0">
+              <a:rPr sz="1700" b="0" i="0">
                 <a:solidFill>
                   <a:srgbClr val="1A1A1A"/>
                 </a:solidFill>
                 <a:latin typeface="Arial"/>
               </a:rPr>
-              <a:t>•  Inventory becomes a vector of Greeks (delta, gamma, vega, ...)</a:t>
+              <a:t>•  Inventory becomes a vector q = (Delta, Gamma, vega, ...)</a:t>
             </a:r>
           </a:p>
           <a:p>
             <a:pPr>
               <a:spcAft>
-                <a:spcPts val="1000"/>
+                <a:spcPts val="800"/>
               </a:spcAft>
             </a:pPr>
             <a:r>
-              <a:rPr sz="1900" b="0" i="0">
+              <a:rPr sz="1700" b="0" i="0">
                 <a:solidFill>
                   <a:srgbClr val="1A1A1A"/>
                 </a:solidFill>
                 <a:latin typeface="Arial"/>
               </a:rPr>
-              <a:t>•  Quadratic inventory penalty and its economic meaning</a:t>
+              <a:t>•  Quadratic inventory penalty; reduces to AS in 1-D</a:t>
             </a:r>
           </a:p>
           <a:p>
             <a:pPr>
               <a:spcAft>
-                <a:spcPts val="1000"/>
+                <a:spcPts val="800"/>
               </a:spcAft>
             </a:pPr>
             <a:r>
-              <a:rPr sz="1900" b="0" i="0">
+              <a:rPr sz="1700" b="0" i="0">
                 <a:solidFill>
                   <a:srgbClr val="1A1A1A"/>
                 </a:solidFill>
                 <a:latin typeface="Arial"/>
               </a:rPr>
-              <a:t>•  The multi-Greek HJB and separation ansatz</a:t>
-            </a:r>
-          </a:p>
-          <a:p>
-            <a:pPr>
-              <a:spcAft>
-                <a:spcPts val="1000"/>
-              </a:spcAft>
-            </a:pPr>
-            <a:r>
-              <a:rPr sz="1900" b="0" i="0">
-                <a:solidFill>
-                  <a:srgbClr val="1A1A1A"/>
-                </a:solidFill>
-                <a:latin typeface="Arial"/>
-              </a:rPr>
-              <a:t>•  Reduces to Avellaneda-Stoikov in the 1-D case</a:t>
+              <a:t>•  Multi-Greek HJB and the separation ansatz</a:t>
             </a:r>
           </a:p>
         </p:txBody>
@@ -3736,13 +3681,13 @@
           <a:noFill/>
         </p:spPr>
         <p:txBody>
-          <a:bodyPr wrap="none">
+          <a:bodyPr wrap="square">
             <a:spAutoFit/>
           </a:bodyPr>
           <a:lstStyle/>
           <a:p>
             <a:r>
-              <a:rPr sz="2600" b="1" i="0">
+              <a:rPr sz="2400" b="1" i="0">
                 <a:solidFill>
                   <a:srgbClr val="990000"/>
                 </a:solidFill>
@@ -3761,8 +3706,8 @@
         </p:nvSpPr>
         <p:spPr>
           <a:xfrm>
-            <a:off x="457200" y="1234440"/>
-            <a:ext cx="11247120" cy="31750"/>
+            <a:off x="457200" y="1371600"/>
+            <a:ext cx="11247120" cy="27940"/>
           </a:xfrm>
           <a:prstGeom prst="rect">
             <a:avLst/>
@@ -3804,7 +3749,7 @@
         </p:nvSpPr>
         <p:spPr>
           <a:xfrm>
-            <a:off x="640080" y="1554480"/>
+            <a:off x="640080" y="1600200"/>
             <a:ext cx="10972800" cy="4937760"/>
           </a:xfrm>
           <a:prstGeom prst="rect">
@@ -3820,65 +3765,49 @@
           <a:p>
             <a:pPr>
               <a:spcAft>
-                <a:spcPts val="1000"/>
+                <a:spcPts val="800"/>
               </a:spcAft>
             </a:pPr>
             <a:r>
-              <a:rPr sz="1900" b="0" i="0">
+              <a:rPr sz="1700" b="0" i="0">
                 <a:solidFill>
                   <a:srgbClr val="1A1A1A"/>
                 </a:solidFill>
                 <a:latin typeface="Arial"/>
               </a:rPr>
-              <a:t>•  Continuous and discrete delta hedging</a:t>
+              <a:t>•  Continuous vs discrete delta hedging</a:t>
             </a:r>
           </a:p>
           <a:p>
             <a:pPr>
               <a:spcAft>
-                <a:spcPts val="1000"/>
+                <a:spcPts val="800"/>
               </a:spcAft>
             </a:pPr>
             <a:r>
-              <a:rPr sz="1900" b="0" i="0">
+              <a:rPr sz="1700" b="0" i="0">
                 <a:solidFill>
                   <a:srgbClr val="1A1A1A"/>
                 </a:solidFill>
                 <a:latin typeface="Arial"/>
               </a:rPr>
-              <a:t>•  The gamma-theta-variance identity (the key to options trading)</a:t>
+              <a:t>•  The gamma-theta-variance identity</a:t>
             </a:r>
           </a:p>
           <a:p>
             <a:pPr>
               <a:spcAft>
-                <a:spcPts val="1000"/>
+                <a:spcPts val="800"/>
               </a:spcAft>
             </a:pPr>
             <a:r>
-              <a:rPr sz="1900" b="0" i="0">
+              <a:rPr sz="1700" b="0" i="0">
                 <a:solidFill>
                   <a:srgbClr val="1A1A1A"/>
                 </a:solidFill>
                 <a:latin typeface="Arial"/>
               </a:rPr>
-              <a:t>•  External vs. integrated hedging architectures</a:t>
-            </a:r>
-          </a:p>
-          <a:p>
-            <a:pPr>
-              <a:spcAft>
-                <a:spcPts val="1000"/>
-              </a:spcAft>
-            </a:pPr>
-            <a:r>
-              <a:rPr sz="1900" b="0" i="0">
-                <a:solidFill>
-                  <a:srgbClr val="1A1A1A"/>
-                </a:solidFill>
-                <a:latin typeface="Arial"/>
-              </a:rPr>
-              <a:t>•  Perpetual futures as the hedge instrument; funding cost</a:t>
+              <a:t>•  Perp futures as the hedge instrument; funding cost</a:t>
             </a:r>
           </a:p>
         </p:txBody>
@@ -3917,7 +3846,7 @@
         </p:blipFill>
         <p:spPr>
           <a:xfrm>
-            <a:off x="9784080" y="274320"/>
+            <a:off x="9784080" y="228600"/>
             <a:ext cx="2011680" cy="316653"/>
           </a:xfrm>
           <a:prstGeom prst="rect">
@@ -3933,8 +3862,8 @@
         </p:nvSpPr>
         <p:spPr>
           <a:xfrm>
-            <a:off x="457200" y="457200"/>
-            <a:ext cx="8961120" cy="822960"/>
+            <a:off x="457200" y="411480"/>
+            <a:ext cx="8961120" cy="731520"/>
           </a:xfrm>
           <a:prstGeom prst="rect">
             <a:avLst/>
@@ -3948,13 +3877,124 @@
           <a:lstStyle/>
           <a:p>
             <a:r>
-              <a:rPr sz="2600" b="1" i="0">
+              <a:rPr sz="2200" b="1" i="0">
                 <a:solidFill>
                   <a:srgbClr val="990000"/>
                 </a:solidFill>
                 <a:latin typeface="Arial"/>
               </a:rPr>
-              <a:t>Recitation &amp; Problem Set 8 (Python/PyTorch)</a:t>
+              <a:t>Illustration</a:t>
+            </a:r>
+          </a:p>
+        </p:txBody>
+      </p:sp>
+      <p:pic>
+        <p:nvPicPr>
+          <p:cNvPr id="4" name="Picture 3" descr="week08.png"/>
+          <p:cNvPicPr>
+            <a:picLocks noChangeAspect="1"/>
+          </p:cNvPicPr>
+          <p:nvPr/>
+        </p:nvPicPr>
+        <p:blipFill>
+          <a:blip r:embed="rId3"/>
+          <a:stretch>
+            <a:fillRect/>
+          </a:stretch>
+        </p:blipFill>
+        <p:spPr>
+          <a:xfrm>
+            <a:off x="1280160" y="1371600"/>
+            <a:ext cx="9601200" cy="5225143"/>
+          </a:xfrm>
+          <a:prstGeom prst="rect">
+            <a:avLst/>
+          </a:prstGeom>
+        </p:spPr>
+      </p:pic>
+    </p:spTree>
+  </p:cSld>
+  <p:clrMapOvr>
+    <a:masterClrMapping/>
+  </p:clrMapOvr>
+</p:sld>
+</file>
+
+<file path=ppt/slides/slide6.xml><?xml version="1.0" encoding="utf-8"?>
+<p:sld xmlns:a="http://schemas.openxmlformats.org/drawingml/2006/main" xmlns:p="http://schemas.openxmlformats.org/presentationml/2006/main" xmlns:r="http://schemas.openxmlformats.org/officeDocument/2006/relationships">
+  <p:cSld>
+    <p:spTree>
+      <p:nvGrpSpPr>
+        <p:cNvPr id="1" name=""/>
+        <p:cNvGrpSpPr/>
+        <p:nvPr/>
+      </p:nvGrpSpPr>
+      <p:grpSpPr/>
+      <p:pic>
+        <p:nvPicPr>
+          <p:cNvPr id="2" name="Picture 1" descr="ncsu_logo.png"/>
+          <p:cNvPicPr>
+            <a:picLocks noChangeAspect="1"/>
+          </p:cNvPicPr>
+          <p:nvPr/>
+        </p:nvPicPr>
+        <p:blipFill>
+          <a:blip r:embed="rId2"/>
+          <a:stretch>
+            <a:fillRect/>
+          </a:stretch>
+        </p:blipFill>
+        <p:spPr>
+          <a:xfrm>
+            <a:off x="9784080" y="274320"/>
+            <a:ext cx="2011680" cy="316653"/>
+          </a:xfrm>
+          <a:prstGeom prst="rect">
+            <a:avLst/>
+          </a:prstGeom>
+        </p:spPr>
+      </p:pic>
+      <p:sp>
+        <p:nvSpPr>
+          <p:cNvPr id="3" name="TextBox 2"/>
+          <p:cNvSpPr txBox="1"/>
+          <p:nvPr/>
+        </p:nvSpPr>
+        <p:spPr>
+          <a:xfrm>
+            <a:off x="457200" y="457200"/>
+            <a:ext cx="8961120" cy="822960"/>
+          </a:xfrm>
+          <a:prstGeom prst="rect">
+            <a:avLst/>
+          </a:prstGeom>
+          <a:noFill/>
+        </p:spPr>
+        <p:txBody>
+          <a:bodyPr wrap="square">
+            <a:spAutoFit/>
+          </a:bodyPr>
+          <a:lstStyle/>
+          <a:p>
+            <a:r>
+              <a:rPr sz="2400" b="1" i="0">
+                <a:solidFill>
+                  <a:srgbClr val="990000"/>
+                </a:solidFill>
+                <a:latin typeface="Arial"/>
+              </a:rPr>
+              <a:t>Key Equations &amp; Why We Choose Them</a:t>
+            </a:r>
+          </a:p>
+          <a:p>
+            <a:r>
+              <a:rPr sz="1300" b="0" i="1">
+                <a:solidFill>
+                  <a:srgbClr val="6D6D6D"/>
+                </a:solidFill>
+                <a:latin typeface="Arial"/>
+              </a:rPr>
+              <a:t>Full derivations in the PDF deck</a:t>
             </a:r>
           </a:p>
         </p:txBody>
@@ -3967,8 +4007,8 @@
         </p:nvSpPr>
         <p:spPr>
           <a:xfrm>
-            <a:off x="457200" y="1234440"/>
-            <a:ext cx="11247120" cy="31750"/>
+            <a:off x="457200" y="1371600"/>
+            <a:ext cx="11247120" cy="27940"/>
           </a:xfrm>
           <a:prstGeom prst="rect">
             <a:avLst/>
@@ -4010,7 +4050,7 @@
         </p:nvSpPr>
         <p:spPr>
           <a:xfrm>
-            <a:off x="640080" y="1554480"/>
+            <a:off x="640080" y="1600200"/>
             <a:ext cx="10972800" cy="4937760"/>
           </a:xfrm>
           <a:prstGeom prst="rect">
@@ -4026,49 +4066,726 @@
           <a:p>
             <a:pPr>
               <a:spcAft>
-                <a:spcPts val="1000"/>
+                <a:spcPts val="500"/>
               </a:spcAft>
             </a:pPr>
             <a:r>
-              <a:rPr sz="1900" b="0" i="0">
+              <a:rPr sz="1200" b="0" i="0">
+                <a:solidFill>
+                  <a:srgbClr val="1A1A1A"/>
+                </a:solidFill>
+                <a:latin typeface="Consolas"/>
+              </a:rPr>
+              <a:t>    \text{penalty} = \tfrac12\, q^{\mathsf T} \Sigma\, q</a:t>
+            </a:r>
+          </a:p>
+          <a:p>
+            <a:pPr>
+              <a:spcAft>
+                <a:spcPts val="500"/>
+              </a:spcAft>
+            </a:pPr>
+            <a:r>
+              <a:rPr sz="1200" b="0" i="0">
                 <a:solidFill>
                   <a:srgbClr val="1A1A1A"/>
                 </a:solidFill>
                 <a:latin typeface="Arial"/>
               </a:rPr>
-              <a:t>•  Multi-Greek HJB walk-through; PyTorch hedged-book simulation</a:t>
+              <a:t>•  why: Inventory risk for an options book is multi-dimensional (delta, gamma, vega...). A quadratic form is the local (mean-variance) risk of the Greek vector; $\Sigma$ is calibrated to the empirical covariance of the Greeks, so cross-risks are priced, not just diagonal ones. It reduces to AS's $q^2$ penalty when there is one Greek.</a:t>
             </a:r>
           </a:p>
           <a:p>
             <a:pPr>
               <a:spcAft>
-                <a:spcPts val="1000"/>
+                <a:spcPts val="500"/>
               </a:spcAft>
             </a:pPr>
             <a:r>
-              <a:rPr sz="1900" b="0" i="0">
+              <a:rPr sz="1200" b="0" i="0">
+                <a:solidFill>
+                  <a:srgbClr val="1A1A1A"/>
+                </a:solidFill>
+                <a:latin typeface="Consolas"/>
+              </a:rPr>
+              <a:t>    d\Pi = \tfrac12\,\Gamma\,S^2\big(\sigma_{\text{real}}^2-\sigma_{\text{impl}}^2\big)\,dt</a:t>
+            </a:r>
+          </a:p>
+          <a:p>
+            <a:pPr>
+              <a:spcAft>
+                <a:spcPts val="500"/>
+              </a:spcAft>
+            </a:pPr>
+            <a:r>
+              <a:rPr sz="1200" b="0" i="0">
                 <a:solidFill>
                   <a:srgbClr val="1A1A1A"/>
                 </a:solidFill>
                 <a:latin typeface="Arial"/>
               </a:rPr>
-              <a:t>•  PS8: inventory dynamics, penalty calibration, threshold hedger</a:t>
-            </a:r>
-          </a:p>
+              <a:t>•  why: The gamma-theta-variance identity: a delta-hedged option earns (or pays) the gap between realized and implied variance, scaled by dollar gamma. This single equation explains ~80% of a hedged book's daily P&amp;L and motivates why we track gamma at all.</a:t>
+            </a:r>
+          </a:p>
+        </p:txBody>
+      </p:sp>
+    </p:spTree>
+  </p:cSld>
+  <p:clrMapOvr>
+    <a:masterClrMapping/>
+  </p:clrMapOvr>
+</p:sld>
+</file>
+
+<file path=ppt/slides/slide7.xml><?xml version="1.0" encoding="utf-8"?>
+<p:sld xmlns:a="http://schemas.openxmlformats.org/drawingml/2006/main" xmlns:p="http://schemas.openxmlformats.org/presentationml/2006/main" xmlns:r="http://schemas.openxmlformats.org/officeDocument/2006/relationships">
+  <p:cSld>
+    <p:spTree>
+      <p:nvGrpSpPr>
+        <p:cNvPr id="1" name=""/>
+        <p:cNvGrpSpPr/>
+        <p:nvPr/>
+      </p:nvGrpSpPr>
+      <p:grpSpPr/>
+      <p:pic>
+        <p:nvPicPr>
+          <p:cNvPr id="2" name="Picture 1" descr="ncsu_logo.png"/>
+          <p:cNvPicPr>
+            <a:picLocks noChangeAspect="1"/>
+          </p:cNvPicPr>
+          <p:nvPr/>
+        </p:nvPicPr>
+        <p:blipFill>
+          <a:blip r:embed="rId2"/>
+          <a:stretch>
+            <a:fillRect/>
+          </a:stretch>
+        </p:blipFill>
+        <p:spPr>
+          <a:xfrm>
+            <a:off x="9784080" y="274320"/>
+            <a:ext cx="2011680" cy="316653"/>
+          </a:xfrm>
+          <a:prstGeom prst="rect">
+            <a:avLst/>
+          </a:prstGeom>
+        </p:spPr>
+      </p:pic>
+      <p:sp>
+        <p:nvSpPr>
+          <p:cNvPr id="3" name="TextBox 2"/>
+          <p:cNvSpPr txBox="1"/>
+          <p:nvPr/>
+        </p:nvSpPr>
+        <p:spPr>
+          <a:xfrm>
+            <a:off x="457200" y="457200"/>
+            <a:ext cx="8961120" cy="822960"/>
+          </a:xfrm>
+          <a:prstGeom prst="rect">
+            <a:avLst/>
+          </a:prstGeom>
+          <a:noFill/>
+        </p:spPr>
+        <p:txBody>
+          <a:bodyPr wrap="square">
+            <a:spAutoFit/>
+          </a:bodyPr>
+          <a:lstStyle/>
+          <a:p>
+            <a:r>
+              <a:rPr sz="2400" b="1" i="0">
+                <a:solidFill>
+                  <a:srgbClr val="990000"/>
+                </a:solidFill>
+                <a:latin typeface="Arial"/>
+              </a:rPr>
+              <a:t>Getting the Data from Coincall</a:t>
+            </a:r>
+          </a:p>
+          <a:p>
+            <a:r>
+              <a:rPr sz="1300" b="0" i="1">
+                <a:solidFill>
+                  <a:srgbClr val="6D6D6D"/>
+                </a:solidFill>
+                <a:latin typeface="Arial"/>
+              </a:rPr>
+              <a:t>Cross-check exact paths at https://docs.coincall.com/</a:t>
+            </a:r>
+          </a:p>
+        </p:txBody>
+      </p:sp>
+      <p:sp>
+        <p:nvSpPr>
+          <p:cNvPr id="4" name="Rectangle 3"/>
+          <p:cNvSpPr/>
+          <p:nvPr/>
+        </p:nvSpPr>
+        <p:spPr>
+          <a:xfrm>
+            <a:off x="457200" y="1371600"/>
+            <a:ext cx="11247120" cy="27940"/>
+          </a:xfrm>
+          <a:prstGeom prst="rect">
+            <a:avLst/>
+          </a:prstGeom>
+          <a:solidFill>
+            <a:srgbClr val="CC0000"/>
+          </a:solidFill>
+          <a:ln>
+            <a:noFill/>
+          </a:ln>
+        </p:spPr>
+        <p:style>
+          <a:lnRef idx="1">
+            <a:schemeClr val="accent1"/>
+          </a:lnRef>
+          <a:fillRef idx="3">
+            <a:schemeClr val="accent1"/>
+          </a:fillRef>
+          <a:effectRef idx="2">
+            <a:schemeClr val="accent1"/>
+          </a:effectRef>
+          <a:fontRef idx="minor">
+            <a:schemeClr val="lt1"/>
+          </a:fontRef>
+        </p:style>
+        <p:txBody>
+          <a:bodyPr rtlCol="0" anchor="ctr"/>
+          <a:lstStyle/>
+          <a:p>
+            <a:pPr algn="ctr"/>
+          </a:p>
+        </p:txBody>
+      </p:sp>
+      <p:sp>
+        <p:nvSpPr>
+          <p:cNvPr id="5" name="TextBox 4"/>
+          <p:cNvSpPr txBox="1"/>
+          <p:nvPr/>
+        </p:nvSpPr>
+        <p:spPr>
+          <a:xfrm>
+            <a:off x="640080" y="1600200"/>
+            <a:ext cx="10972800" cy="4937760"/>
+          </a:xfrm>
+          <a:prstGeom prst="rect">
+            <a:avLst/>
+          </a:prstGeom>
+          <a:noFill/>
+        </p:spPr>
+        <p:txBody>
+          <a:bodyPr wrap="square">
+            <a:spAutoFit/>
+          </a:bodyPr>
+          <a:lstStyle/>
           <a:p>
             <a:pPr>
               <a:spcAft>
-                <a:spcPts val="1000"/>
+                <a:spcPts val="500"/>
               </a:spcAft>
             </a:pPr>
             <a:r>
-              <a:rPr sz="1900" b="0" i="0">
+              <a:rPr sz="1200" b="0" i="0">
                 <a:solidFill>
                   <a:srgbClr val="1A1A1A"/>
                 </a:solidFill>
                 <a:latin typeface="Arial"/>
               </a:rPr>
-              <a:t>•  Reading: El Aoud-Abergel (2015); Taleb (1997)</a:t>
+              <a:t>•  Greeks per contract (for the inventory vector and Sigma):</a:t>
+            </a:r>
+          </a:p>
+          <a:p>
+            <a:pPr>
+              <a:spcAft>
+                <a:spcPts val="500"/>
+              </a:spcAft>
+            </a:pPr>
+            <a:r>
+              <a:rPr sz="1200" b="0" i="0">
+                <a:solidFill>
+                  <a:srgbClr val="1A1A1A"/>
+                </a:solidFill>
+                <a:latin typeface="Consolas"/>
+              </a:rPr>
+              <a:t>    GET /open/option/detail/v1/{symbol}  -&gt; delta, gamma, vega, theta, rho</a:t>
+            </a:r>
+          </a:p>
+          <a:p>
+            <a:pPr>
+              <a:spcAft>
+                <a:spcPts val="500"/>
+              </a:spcAft>
+            </a:pPr>
+            <a:r>
+              <a:rPr sz="1200" b="0" i="0">
+                <a:solidFill>
+                  <a:srgbClr val="1A1A1A"/>
+                </a:solidFill>
+                <a:latin typeface="Arial"/>
+              </a:rPr>
+              <a:t>•  Hedge instrument + carry:</a:t>
+            </a:r>
+          </a:p>
+          <a:p>
+            <a:pPr>
+              <a:spcAft>
+                <a:spcPts val="500"/>
+              </a:spcAft>
+            </a:pPr>
+            <a:r>
+              <a:rPr sz="1200" b="0" i="0">
+                <a:solidFill>
+                  <a:srgbClr val="1A1A1A"/>
+                </a:solidFill>
+                <a:latin typeface="Consolas"/>
+              </a:rPr>
+              <a:t>    Perp book:  GET /open/futures/order/orderbook/v1/{symbol}</a:t>
+            </a:r>
+          </a:p>
+          <a:p>
+            <a:pPr>
+              <a:spcAft>
+                <a:spcPts val="500"/>
+              </a:spcAft>
+            </a:pPr>
+            <a:r>
+              <a:rPr sz="1200" b="0" i="0">
+                <a:solidFill>
+                  <a:srgbClr val="1A1A1A"/>
+                </a:solidFill>
+                <a:latin typeface="Consolas"/>
+              </a:rPr>
+              <a:t>    Funding:    GET /open/public/fundingRate/v1?symbol=BTCUSD</a:t>
+            </a:r>
+          </a:p>
+          <a:p>
+            <a:pPr>
+              <a:spcAft>
+                <a:spcPts val="500"/>
+              </a:spcAft>
+            </a:pPr>
+            <a:r>
+              <a:rPr sz="1200" b="0" i="0">
+                <a:solidFill>
+                  <a:srgbClr val="1A1A1A"/>
+                </a:solidFill>
+                <a:latin typeface="Arial"/>
+              </a:rPr>
+              <a:t>•  Offline: coincall_funding_rates_2025Q4.parquet for hedge-cost accounting</a:t>
+            </a:r>
+          </a:p>
+        </p:txBody>
+      </p:sp>
+    </p:spTree>
+  </p:cSld>
+  <p:clrMapOvr>
+    <a:masterClrMapping/>
+  </p:clrMapOvr>
+</p:sld>
+</file>
+
+<file path=ppt/slides/slide8.xml><?xml version="1.0" encoding="utf-8"?>
+<p:sld xmlns:a="http://schemas.openxmlformats.org/drawingml/2006/main" xmlns:p="http://schemas.openxmlformats.org/presentationml/2006/main" xmlns:r="http://schemas.openxmlformats.org/officeDocument/2006/relationships">
+  <p:cSld>
+    <p:spTree>
+      <p:nvGrpSpPr>
+        <p:cNvPr id="1" name=""/>
+        <p:cNvGrpSpPr/>
+        <p:nvPr/>
+      </p:nvGrpSpPr>
+      <p:grpSpPr/>
+      <p:sp>
+        <p:nvSpPr>
+          <p:cNvPr id="2" name="TextBox 1"/>
+          <p:cNvSpPr txBox="1"/>
+          <p:nvPr/>
+        </p:nvSpPr>
+        <p:spPr>
+          <a:xfrm>
+            <a:off x="457200" y="365760"/>
+            <a:ext cx="11247120" cy="640080"/>
+          </a:xfrm>
+          <a:prstGeom prst="rect">
+            <a:avLst/>
+          </a:prstGeom>
+          <a:noFill/>
+        </p:spPr>
+        <p:txBody>
+          <a:bodyPr wrap="none">
+            <a:spAutoFit/>
+          </a:bodyPr>
+          <a:lstStyle/>
+          <a:p>
+            <a:r>
+              <a:rPr sz="1800" b="1" i="0">
+                <a:solidFill>
+                  <a:srgbClr val="990000"/>
+                </a:solidFill>
+                <a:latin typeface="Arial"/>
+              </a:rPr>
+              <a:t>Code — week8_hedge.py -- aggregate Greeks &amp; threshold delta hedge</a:t>
+            </a:r>
+          </a:p>
+        </p:txBody>
+      </p:sp>
+      <p:sp>
+        <p:nvSpPr>
+          <p:cNvPr id="3" name="Rectangle 2"/>
+          <p:cNvSpPr/>
+          <p:nvPr/>
+        </p:nvSpPr>
+        <p:spPr>
+          <a:xfrm>
+            <a:off x="457200" y="1097280"/>
+            <a:ext cx="11247120" cy="5394960"/>
+          </a:xfrm>
+          <a:prstGeom prst="rect">
+            <a:avLst/>
+          </a:prstGeom>
+          <a:solidFill>
+            <a:srgbClr val="F5F5F5"/>
+          </a:solidFill>
+          <a:ln w="9525">
+            <a:solidFill>
+              <a:srgbClr val="6D6D6D"/>
+            </a:solidFill>
+          </a:ln>
+        </p:spPr>
+        <p:style>
+          <a:lnRef idx="1">
+            <a:schemeClr val="accent1"/>
+          </a:lnRef>
+          <a:fillRef idx="3">
+            <a:schemeClr val="accent1"/>
+          </a:fillRef>
+          <a:effectRef idx="2">
+            <a:schemeClr val="accent1"/>
+          </a:effectRef>
+          <a:fontRef idx="minor">
+            <a:schemeClr val="lt1"/>
+          </a:fontRef>
+        </p:style>
+        <p:txBody>
+          <a:bodyPr rtlCol="0" anchor="ctr" wrap="square" lIns="182880" tIns="91440"/>
+          <a:lstStyle/>
+          <a:p>
+            <a:pPr algn="ctr">
+              <a:spcAft>
+                <a:spcPts val="0"/>
+              </a:spcAft>
+            </a:pPr>
+            <a:r>
+              <a:rPr sz="1100" b="0" i="0">
+                <a:solidFill>
+                  <a:srgbClr val="1A1A1A"/>
+                </a:solidFill>
+                <a:latin typeface="Consolas"/>
+              </a:rPr>
+              <a:t>import torch</a:t>
+            </a:r>
+          </a:p>
+          <a:p>
+            <a:pPr>
+              <a:spcAft>
+                <a:spcPts val="0"/>
+              </a:spcAft>
+            </a:pPr>
+            <a:r>
+              <a:rPr sz="1100" b="0" i="0">
+                <a:solidFill>
+                  <a:srgbClr val="1A1A1A"/>
+                </a:solidFill>
+                <a:latin typeface="Consolas"/>
+              </a:rPr>
+              <a:t>def book_greeks(positions, greeks):</a:t>
+            </a:r>
+          </a:p>
+          <a:p>
+            <a:pPr>
+              <a:spcAft>
+                <a:spcPts val="0"/>
+              </a:spcAft>
+            </a:pPr>
+            <a:r>
+              <a:rPr sz="1100" b="0" i="0">
+                <a:solidFill>
+                  <a:srgbClr val="1A1A1A"/>
+                </a:solidFill>
+                <a:latin typeface="Consolas"/>
+              </a:rPr>
+              <a:t>    # positions: (n,), greeks: (n,5) columns [delta,gamma,vega,theta,rho]</a:t>
+            </a:r>
+          </a:p>
+          <a:p>
+            <a:pPr>
+              <a:spcAft>
+                <a:spcPts val="0"/>
+              </a:spcAft>
+            </a:pPr>
+            <a:r>
+              <a:rPr sz="1100" b="0" i="0">
+                <a:solidFill>
+                  <a:srgbClr val="1A1A1A"/>
+                </a:solidFill>
+                <a:latin typeface="Consolas"/>
+              </a:rPr>
+              <a:t>    return (positions[:, None] * greeks).sum(0)      # aggregate inventory vector</a:t>
+            </a:r>
+          </a:p>
+          <a:p>
+            <a:pPr>
+              <a:spcAft>
+                <a:spcPts val="0"/>
+              </a:spcAft>
+            </a:pPr>
+            <a:r>
+              <a:rPr sz="1100" b="0" i="0">
+                <a:solidFill>
+                  <a:srgbClr val="1A1A1A"/>
+                </a:solidFill>
+                <a:latin typeface="Consolas"/>
+              </a:rPr>
+              <a:t> </a:t>
+            </a:r>
+          </a:p>
+          <a:p>
+            <a:pPr>
+              <a:spcAft>
+                <a:spcPts val="0"/>
+              </a:spcAft>
+            </a:pPr>
+            <a:r>
+              <a:rPr sz="1100" b="0" i="0">
+                <a:solidFill>
+                  <a:srgbClr val="1A1A1A"/>
+                </a:solidFill>
+                <a:latin typeface="Consolas"/>
+              </a:rPr>
+              <a:t>def delta_hedge(net_delta, perp_pos, threshold=0.1):</a:t>
+            </a:r>
+          </a:p>
+          <a:p>
+            <a:pPr>
+              <a:spcAft>
+                <a:spcPts val="0"/>
+              </a:spcAft>
+            </a:pPr>
+            <a:r>
+              <a:rPr sz="1100" b="0" i="0">
+                <a:solidFill>
+                  <a:srgbClr val="1A1A1A"/>
+                </a:solidFill>
+                <a:latin typeface="Consolas"/>
+              </a:rPr>
+              <a:t>    if net_delta.abs() &gt; threshold:                  # rebalance only when breached</a:t>
+            </a:r>
+          </a:p>
+          <a:p>
+            <a:pPr>
+              <a:spcAft>
+                <a:spcPts val="0"/>
+              </a:spcAft>
+            </a:pPr>
+            <a:r>
+              <a:rPr sz="1100" b="0" i="0">
+                <a:solidFill>
+                  <a:srgbClr val="1A1A1A"/>
+                </a:solidFill>
+                <a:latin typeface="Consolas"/>
+              </a:rPr>
+              <a:t>        trade = -net_delta                           # hedge with perp futures</a:t>
+            </a:r>
+          </a:p>
+          <a:p>
+            <a:pPr>
+              <a:spcAft>
+                <a:spcPts val="0"/>
+              </a:spcAft>
+            </a:pPr>
+            <a:r>
+              <a:rPr sz="1100" b="0" i="0">
+                <a:solidFill>
+                  <a:srgbClr val="1A1A1A"/>
+                </a:solidFill>
+                <a:latin typeface="Consolas"/>
+              </a:rPr>
+              <a:t>        return perp_pos + trade, trade</a:t>
+            </a:r>
+          </a:p>
+          <a:p>
+            <a:pPr>
+              <a:spcAft>
+                <a:spcPts val="0"/>
+              </a:spcAft>
+            </a:pPr>
+            <a:r>
+              <a:rPr sz="1100" b="0" i="0">
+                <a:solidFill>
+                  <a:srgbClr val="1A1A1A"/>
+                </a:solidFill>
+                <a:latin typeface="Consolas"/>
+              </a:rPr>
+              <a:t>    return perp_pos, torch.tensor(0.0)</a:t>
+            </a:r>
+          </a:p>
+        </p:txBody>
+      </p:sp>
+    </p:spTree>
+  </p:cSld>
+  <p:clrMapOvr>
+    <a:masterClrMapping/>
+  </p:clrMapOvr>
+</p:sld>
+</file>
+
+<file path=ppt/slides/slide9.xml><?xml version="1.0" encoding="utf-8"?>
+<p:sld xmlns:a="http://schemas.openxmlformats.org/drawingml/2006/main" xmlns:p="http://schemas.openxmlformats.org/presentationml/2006/main" xmlns:r="http://schemas.openxmlformats.org/officeDocument/2006/relationships">
+  <p:cSld>
+    <p:spTree>
+      <p:nvGrpSpPr>
+        <p:cNvPr id="1" name=""/>
+        <p:cNvGrpSpPr/>
+        <p:nvPr/>
+      </p:nvGrpSpPr>
+      <p:grpSpPr/>
+      <p:pic>
+        <p:nvPicPr>
+          <p:cNvPr id="2" name="Picture 1" descr="ncsu_logo.png"/>
+          <p:cNvPicPr>
+            <a:picLocks noChangeAspect="1"/>
+          </p:cNvPicPr>
+          <p:nvPr/>
+        </p:nvPicPr>
+        <p:blipFill>
+          <a:blip r:embed="rId2"/>
+          <a:stretch>
+            <a:fillRect/>
+          </a:stretch>
+        </p:blipFill>
+        <p:spPr>
+          <a:xfrm>
+            <a:off x="9784080" y="274320"/>
+            <a:ext cx="2011680" cy="316653"/>
+          </a:xfrm>
+          <a:prstGeom prst="rect">
+            <a:avLst/>
+          </a:prstGeom>
+        </p:spPr>
+      </p:pic>
+      <p:sp>
+        <p:nvSpPr>
+          <p:cNvPr id="3" name="TextBox 2"/>
+          <p:cNvSpPr txBox="1"/>
+          <p:nvPr/>
+        </p:nvSpPr>
+        <p:spPr>
+          <a:xfrm>
+            <a:off x="457200" y="457200"/>
+            <a:ext cx="8961120" cy="822960"/>
+          </a:xfrm>
+          <a:prstGeom prst="rect">
+            <a:avLst/>
+          </a:prstGeom>
+          <a:noFill/>
+        </p:spPr>
+        <p:txBody>
+          <a:bodyPr wrap="square">
+            <a:spAutoFit/>
+          </a:bodyPr>
+          <a:lstStyle/>
+          <a:p>
+            <a:r>
+              <a:rPr sz="2400" b="1" i="0">
+                <a:solidFill>
+                  <a:srgbClr val="990000"/>
+                </a:solidFill>
+                <a:latin typeface="Arial"/>
+              </a:rPr>
+              <a:t>Reading</a:t>
+            </a:r>
+          </a:p>
+        </p:txBody>
+      </p:sp>
+      <p:sp>
+        <p:nvSpPr>
+          <p:cNvPr id="4" name="Rectangle 3"/>
+          <p:cNvSpPr/>
+          <p:nvPr/>
+        </p:nvSpPr>
+        <p:spPr>
+          <a:xfrm>
+            <a:off x="457200" y="1371600"/>
+            <a:ext cx="11247120" cy="27940"/>
+          </a:xfrm>
+          <a:prstGeom prst="rect">
+            <a:avLst/>
+          </a:prstGeom>
+          <a:solidFill>
+            <a:srgbClr val="CC0000"/>
+          </a:solidFill>
+          <a:ln>
+            <a:noFill/>
+          </a:ln>
+        </p:spPr>
+        <p:style>
+          <a:lnRef idx="1">
+            <a:schemeClr val="accent1"/>
+          </a:lnRef>
+          <a:fillRef idx="3">
+            <a:schemeClr val="accent1"/>
+          </a:fillRef>
+          <a:effectRef idx="2">
+            <a:schemeClr val="accent1"/>
+          </a:effectRef>
+          <a:fontRef idx="minor">
+            <a:schemeClr val="lt1"/>
+          </a:fontRef>
+        </p:style>
+        <p:txBody>
+          <a:bodyPr rtlCol="0" anchor="ctr"/>
+          <a:lstStyle/>
+          <a:p>
+            <a:pPr algn="ctr"/>
+          </a:p>
+        </p:txBody>
+      </p:sp>
+      <p:sp>
+        <p:nvSpPr>
+          <p:cNvPr id="5" name="TextBox 4"/>
+          <p:cNvSpPr txBox="1"/>
+          <p:nvPr/>
+        </p:nvSpPr>
+        <p:spPr>
+          <a:xfrm>
+            <a:off x="640080" y="1600200"/>
+            <a:ext cx="10972800" cy="4937760"/>
+          </a:xfrm>
+          <a:prstGeom prst="rect">
+            <a:avLst/>
+          </a:prstGeom>
+          <a:noFill/>
+        </p:spPr>
+        <p:txBody>
+          <a:bodyPr wrap="square">
+            <a:spAutoFit/>
+          </a:bodyPr>
+          <a:lstStyle/>
+          <a:p>
+            <a:pPr>
+              <a:spcAft>
+                <a:spcPts val="800"/>
+              </a:spcAft>
+            </a:pPr>
+            <a:r>
+              <a:rPr sz="1700" b="0" i="0">
+                <a:solidFill>
+                  <a:srgbClr val="1A1A1A"/>
+                </a:solidFill>
+                <a:latin typeface="Arial"/>
+              </a:rPr>
+              <a:t>•  El Aoud-Abergel (2015); Taleb (1997); Cartea et al., Ch. 11</a:t>
             </a:r>
           </a:p>
         </p:txBody>
